--- a/Design/website-design.pptx
+++ b/Design/website-design.pptx
@@ -105,6 +105,11 @@
       </a:defRPr>
     </a:lvl9pPr>
   </p:defaultTextStyle>
+  <p:extLst>
+    <p:ext uri="{EFAFB233-063F-42B5-8137-9DF3F51BA10A}">
+      <p15:sldGuideLst xmlns:p15="http://schemas.microsoft.com/office/powerpoint/2012/main"/>
+    </p:ext>
+  </p:extLst>
 </p:presentation>
 </file>
 
@@ -3439,8 +3444,8 @@
         </p:nvSpPr>
         <p:spPr>
           <a:xfrm>
-            <a:off x="0" y="1306286"/>
-            <a:ext cx="12192000" cy="4644571"/>
+            <a:off x="2296390" y="467304"/>
+            <a:ext cx="7772401" cy="5483553"/>
           </a:xfrm>
           <a:prstGeom prst="rect">
             <a:avLst/>
@@ -3507,8 +3512,8 @@
         </p:nvSpPr>
         <p:spPr>
           <a:xfrm>
-            <a:off x="1524000" y="1122364"/>
-            <a:ext cx="9144000" cy="1446666"/>
+            <a:off x="2296390" y="1735282"/>
+            <a:ext cx="7772400" cy="1000003"/>
           </a:xfrm>
         </p:spPr>
         <p:txBody>
@@ -3548,14 +3553,102 @@
         </p:blipFill>
         <p:spPr>
           <a:xfrm>
-            <a:off x="4470400" y="2569030"/>
-            <a:ext cx="3251200" cy="3251200"/>
+            <a:off x="4704771" y="2644897"/>
+            <a:ext cx="2955637" cy="2955637"/>
           </a:xfrm>
           <a:prstGeom prst="rect">
             <a:avLst/>
           </a:prstGeom>
         </p:spPr>
       </p:pic>
+      <p:pic>
+        <p:nvPicPr>
+          <p:cNvPr id="6" name="Picture 5">
+            <a:extLst>
+              <a:ext uri="{FF2B5EF4-FFF2-40B4-BE49-F238E27FC236}">
+                <a16:creationId xmlns:a16="http://schemas.microsoft.com/office/drawing/2014/main" id="{D60B142A-CBE4-C1AF-B0FB-9D04BBA70D70}"/>
+              </a:ext>
+            </a:extLst>
+          </p:cNvPr>
+          <p:cNvPicPr>
+            <a:picLocks noChangeAspect="1"/>
+          </p:cNvPicPr>
+          <p:nvPr/>
+        </p:nvPicPr>
+        <p:blipFill>
+          <a:blip r:embed="rId3"/>
+          <a:stretch>
+            <a:fillRect/>
+          </a:stretch>
+        </p:blipFill>
+        <p:spPr>
+          <a:xfrm>
+            <a:off x="2296391" y="467304"/>
+            <a:ext cx="7772400" cy="1310120"/>
+          </a:xfrm>
+          <a:prstGeom prst="rect">
+            <a:avLst/>
+          </a:prstGeom>
+        </p:spPr>
+      </p:pic>
+      <p:sp>
+        <p:nvSpPr>
+          <p:cNvPr id="7" name="Title 1">
+            <a:extLst>
+              <a:ext uri="{FF2B5EF4-FFF2-40B4-BE49-F238E27FC236}">
+                <a16:creationId xmlns:a16="http://schemas.microsoft.com/office/drawing/2014/main" id="{95E98A8C-D2C0-8960-3430-904DA1FD5B9C}"/>
+              </a:ext>
+            </a:extLst>
+          </p:cNvPr>
+          <p:cNvSpPr txBox="1">
+            <a:spLocks/>
+          </p:cNvSpPr>
+          <p:nvPr/>
+        </p:nvSpPr>
+        <p:spPr>
+          <a:xfrm>
+            <a:off x="2303318" y="5448197"/>
+            <a:ext cx="7772400" cy="429365"/>
+          </a:xfrm>
+          <a:prstGeom prst="rect">
+            <a:avLst/>
+          </a:prstGeom>
+        </p:spPr>
+        <p:txBody>
+          <a:bodyPr vert="horz" lIns="91440" tIns="45720" rIns="91440" bIns="45720" rtlCol="0" anchor="b">
+            <a:normAutofit/>
+          </a:bodyPr>
+          <a:lstStyle>
+            <a:lvl1pPr algn="ctr" defTabSz="914400" rtl="0" eaLnBrk="1" latinLnBrk="0" hangingPunct="1">
+              <a:lnSpc>
+                <a:spcPct val="90000"/>
+              </a:lnSpc>
+              <a:spcBef>
+                <a:spcPct val="0"/>
+              </a:spcBef>
+              <a:buNone/>
+              <a:defRPr sz="6000" kern="1200">
+                <a:solidFill>
+                  <a:schemeClr val="tx1"/>
+                </a:solidFill>
+                <a:latin typeface="+mj-lt"/>
+                <a:ea typeface="+mj-ea"/>
+                <a:cs typeface="+mj-cs"/>
+              </a:defRPr>
+            </a:lvl1pPr>
+          </a:lstStyle>
+          <a:p>
+            <a:r>
+              <a:rPr lang="en-US" sz="2000" dirty="0">
+                <a:latin typeface="Ubuntu Medium" panose="020B0504030602030204" pitchFamily="34" charset="0"/>
+                <a:ea typeface="Google Sans" pitchFamily="2" charset="0"/>
+                <a:cs typeface="Google Sans" pitchFamily="2" charset="0"/>
+              </a:rPr>
+              <a:t>https://zoomit4mac.corti.com</a:t>
+            </a:r>
+          </a:p>
+        </p:txBody>
+      </p:sp>
     </p:spTree>
     <p:extLst>
       <p:ext uri="{BB962C8B-B14F-4D97-AF65-F5344CB8AC3E}">
